--- a/Section 504/t2-lesson1-bellwork-504-ANSWER-KEY.pptx
+++ b/Section 504/t2-lesson1-bellwork-504-ANSWER-KEY.pptx
@@ -1101,6 +1101,40 @@
           </a:p>
         </p:txBody>
       </p:sp>
+      <p:sp>
+        <p:nvSpPr>
+          <p:cNvPr id="8" name="Slide Number 8"/>
+          <p:cNvSpPr txBox="1"/>
+          <p:nvPr/>
+        </p:nvSpPr>
+        <p:spPr>
+          <a:xfrm>
+            <a:off x="11277295" y="6611112"/>
+            <a:ext cx="685800" cy="201168"/>
+          </a:xfrm>
+          <a:prstGeom prst="rect">
+            <a:avLst/>
+          </a:prstGeom>
+          <a:noFill/>
+        </p:spPr>
+        <p:txBody>
+          <a:bodyPr wrap="none" lIns="0" tIns="0" rIns="0" bIns="0" anchor="b">
+            <a:noAutofit/>
+          </a:bodyPr>
+          <a:lstStyle/>
+          <a:p>
+            <a:pPr algn="r"/>
+            <a:fld id="{5C1A6E0B-3B1F-4D5E-9C7A-2F4B8D6E1A90}" type="slidenum">
+              <a:rPr lang="en-US" sz="1200" dirty="0">
+                <a:solidFill>
+                  <a:srgbClr val="5F6272"/>
+                </a:solidFill>
+              </a:rPr>
+              <a:t>1</a:t>
+            </a:fld>
+          </a:p>
+        </p:txBody>
+      </p:sp>
     </p:spTree>
   </p:cSld>
   <p:clrMapOvr>
@@ -1714,6 +1748,40 @@
           </a:p>
         </p:txBody>
       </p:sp>
+      <p:sp>
+        <p:nvSpPr>
+          <p:cNvPr id="16" name="Slide Number 16"/>
+          <p:cNvSpPr txBox="1"/>
+          <p:nvPr/>
+        </p:nvSpPr>
+        <p:spPr>
+          <a:xfrm>
+            <a:off x="11277295" y="6611112"/>
+            <a:ext cx="685800" cy="201168"/>
+          </a:xfrm>
+          <a:prstGeom prst="rect">
+            <a:avLst/>
+          </a:prstGeom>
+          <a:noFill/>
+        </p:spPr>
+        <p:txBody>
+          <a:bodyPr wrap="none" lIns="0" tIns="0" rIns="0" bIns="0" anchor="b">
+            <a:noAutofit/>
+          </a:bodyPr>
+          <a:lstStyle/>
+          <a:p>
+            <a:pPr algn="r"/>
+            <a:fld id="{5C1A6E0B-3B1F-4D5E-9C7A-2F4B8D6E1A90}" type="slidenum">
+              <a:rPr lang="en-US" sz="1200" dirty="0">
+                <a:solidFill>
+                  <a:srgbClr val="5F6272"/>
+                </a:solidFill>
+              </a:rPr>
+              <a:t>2</a:t>
+            </a:fld>
+          </a:p>
+        </p:txBody>
+      </p:sp>
     </p:spTree>
   </p:cSld>
   <p:clrMapOvr>
@@ -2327,6 +2395,40 @@
           </a:p>
         </p:txBody>
       </p:sp>
+      <p:sp>
+        <p:nvSpPr>
+          <p:cNvPr id="16" name="Slide Number 16"/>
+          <p:cNvSpPr txBox="1"/>
+          <p:nvPr/>
+        </p:nvSpPr>
+        <p:spPr>
+          <a:xfrm>
+            <a:off x="11277295" y="6611112"/>
+            <a:ext cx="685800" cy="201168"/>
+          </a:xfrm>
+          <a:prstGeom prst="rect">
+            <a:avLst/>
+          </a:prstGeom>
+          <a:noFill/>
+        </p:spPr>
+        <p:txBody>
+          <a:bodyPr wrap="none" lIns="0" tIns="0" rIns="0" bIns="0" anchor="b">
+            <a:noAutofit/>
+          </a:bodyPr>
+          <a:lstStyle/>
+          <a:p>
+            <a:pPr algn="r"/>
+            <a:fld id="{5C1A6E0B-3B1F-4D5E-9C7A-2F4B8D6E1A90}" type="slidenum">
+              <a:rPr lang="en-US" sz="1200" dirty="0">
+                <a:solidFill>
+                  <a:srgbClr val="5F6272"/>
+                </a:solidFill>
+              </a:rPr>
+              <a:t>3</a:t>
+            </a:fld>
+          </a:p>
+        </p:txBody>
+      </p:sp>
     </p:spTree>
   </p:cSld>
   <p:clrMapOvr>
@@ -2960,6 +3062,40 @@
           </a:p>
         </p:txBody>
       </p:sp>
+      <p:sp>
+        <p:nvSpPr>
+          <p:cNvPr id="16" name="Slide Number 16"/>
+          <p:cNvSpPr txBox="1"/>
+          <p:nvPr/>
+        </p:nvSpPr>
+        <p:spPr>
+          <a:xfrm>
+            <a:off x="11277295" y="6611112"/>
+            <a:ext cx="685800" cy="201168"/>
+          </a:xfrm>
+          <a:prstGeom prst="rect">
+            <a:avLst/>
+          </a:prstGeom>
+          <a:noFill/>
+        </p:spPr>
+        <p:txBody>
+          <a:bodyPr wrap="none" lIns="0" tIns="0" rIns="0" bIns="0" anchor="b">
+            <a:noAutofit/>
+          </a:bodyPr>
+          <a:lstStyle/>
+          <a:p>
+            <a:pPr algn="r"/>
+            <a:fld id="{5C1A6E0B-3B1F-4D5E-9C7A-2F4B8D6E1A90}" type="slidenum">
+              <a:rPr lang="en-US" sz="1200" dirty="0">
+                <a:solidFill>
+                  <a:srgbClr val="5F6272"/>
+                </a:solidFill>
+              </a:rPr>
+              <a:t>4</a:t>
+            </a:fld>
+          </a:p>
+        </p:txBody>
+      </p:sp>
     </p:spTree>
   </p:cSld>
   <p:clrMapOvr>
@@ -3593,6 +3729,40 @@
           </a:p>
         </p:txBody>
       </p:sp>
+      <p:sp>
+        <p:nvSpPr>
+          <p:cNvPr id="16" name="Slide Number 16"/>
+          <p:cNvSpPr txBox="1"/>
+          <p:nvPr/>
+        </p:nvSpPr>
+        <p:spPr>
+          <a:xfrm>
+            <a:off x="11277295" y="6611112"/>
+            <a:ext cx="685800" cy="201168"/>
+          </a:xfrm>
+          <a:prstGeom prst="rect">
+            <a:avLst/>
+          </a:prstGeom>
+          <a:noFill/>
+        </p:spPr>
+        <p:txBody>
+          <a:bodyPr wrap="none" lIns="0" tIns="0" rIns="0" bIns="0" anchor="b">
+            <a:noAutofit/>
+          </a:bodyPr>
+          <a:lstStyle/>
+          <a:p>
+            <a:pPr algn="r"/>
+            <a:fld id="{5C1A6E0B-3B1F-4D5E-9C7A-2F4B8D6E1A90}" type="slidenum">
+              <a:rPr lang="en-US" sz="1200" dirty="0">
+                <a:solidFill>
+                  <a:srgbClr val="5F6272"/>
+                </a:solidFill>
+              </a:rPr>
+              <a:t>5</a:t>
+            </a:fld>
+          </a:p>
+        </p:txBody>
+      </p:sp>
     </p:spTree>
   </p:cSld>
   <p:clrMapOvr>
@@ -4226,6 +4396,40 @@
           </a:p>
         </p:txBody>
       </p:sp>
+      <p:sp>
+        <p:nvSpPr>
+          <p:cNvPr id="16" name="Slide Number 16"/>
+          <p:cNvSpPr txBox="1"/>
+          <p:nvPr/>
+        </p:nvSpPr>
+        <p:spPr>
+          <a:xfrm>
+            <a:off x="11277295" y="6611112"/>
+            <a:ext cx="685800" cy="201168"/>
+          </a:xfrm>
+          <a:prstGeom prst="rect">
+            <a:avLst/>
+          </a:prstGeom>
+          <a:noFill/>
+        </p:spPr>
+        <p:txBody>
+          <a:bodyPr wrap="none" lIns="0" tIns="0" rIns="0" bIns="0" anchor="b">
+            <a:noAutofit/>
+          </a:bodyPr>
+          <a:lstStyle/>
+          <a:p>
+            <a:pPr algn="r"/>
+            <a:fld id="{5C1A6E0B-3B1F-4D5E-9C7A-2F4B8D6E1A90}" type="slidenum">
+              <a:rPr lang="en-US" sz="1200" dirty="0">
+                <a:solidFill>
+                  <a:srgbClr val="5F6272"/>
+                </a:solidFill>
+              </a:rPr>
+              <a:t>6</a:t>
+            </a:fld>
+          </a:p>
+        </p:txBody>
+      </p:sp>
     </p:spTree>
   </p:cSld>
   <p:clrMapOvr>
@@ -4856,6 +5060,40 @@
               <a:t xml:space="preserve">Topic 2 Lesson 1 Bell Work · Section 504 Version · Answer Key (teacher copy)</a:t>
             </a:r>
             <a:endParaRPr lang="en-US" sz="1125" dirty="0"/>
+          </a:p>
+        </p:txBody>
+      </p:sp>
+      <p:sp>
+        <p:nvSpPr>
+          <p:cNvPr id="16" name="Slide Number 16"/>
+          <p:cNvSpPr txBox="1"/>
+          <p:nvPr/>
+        </p:nvSpPr>
+        <p:spPr>
+          <a:xfrm>
+            <a:off x="11277295" y="6611112"/>
+            <a:ext cx="685800" cy="201168"/>
+          </a:xfrm>
+          <a:prstGeom prst="rect">
+            <a:avLst/>
+          </a:prstGeom>
+          <a:noFill/>
+        </p:spPr>
+        <p:txBody>
+          <a:bodyPr wrap="none" lIns="0" tIns="0" rIns="0" bIns="0" anchor="b">
+            <a:noAutofit/>
+          </a:bodyPr>
+          <a:lstStyle/>
+          <a:p>
+            <a:pPr algn="r"/>
+            <a:fld id="{5C1A6E0B-3B1F-4D5E-9C7A-2F4B8D6E1A90}" type="slidenum">
+              <a:rPr lang="en-US" sz="1200" dirty="0">
+                <a:solidFill>
+                  <a:srgbClr val="5F6272"/>
+                </a:solidFill>
+              </a:rPr>
+              <a:t>7</a:t>
+            </a:fld>
           </a:p>
         </p:txBody>
       </p:sp>

--- a/Section 504/t2-lesson1-bellwork-504-ANSWER-KEY.pptx
+++ b/Section 504/t2-lesson1-bellwork-504-ANSWER-KEY.pptx
@@ -2188,7 +2188,7 @@
         <p:spPr>
           <a:xfrm>
             <a:off x="685800" y="2457450"/>
-            <a:ext cx="2164019" cy="1024128"/>
+            <a:ext cx="2164019" cy="1298448"/>
           </a:xfrm>
           <a:prstGeom prst="rect">
             <a:avLst/>
@@ -2232,7 +2232,7 @@
         <p:spPr>
           <a:xfrm>
             <a:off x="2849819" y="2457450"/>
-            <a:ext cx="4328038" cy="1024128"/>
+            <a:ext cx="4328038" cy="1298448"/>
           </a:xfrm>
           <a:prstGeom prst="rect">
             <a:avLst/>
@@ -2261,7 +2261,7 @@
                 <a:latin typeface="Segoe UI"/>
                 <a:cs typeface="Segoe UI"/>
               </a:rPr>
-              <a:t xml:space="preserve">Which line is parallel to y = 3x + 1?</a:t>
+              <a:t xml:space="preserve">Which equation in slope-intercept form is parallel to y = 3x + 1 and passes through (1, 5)?</a:t>
             </a:r>
             <a:endParaRPr lang="en-US" sz="1800" dirty="0"/>
           </a:p>
@@ -2276,7 +2276,7 @@
         <p:spPr>
           <a:xfrm>
             <a:off x="7177857" y="2457450"/>
-            <a:ext cx="4328038" cy="1024128"/>
+            <a:ext cx="4328038" cy="1298448"/>
           </a:xfrm>
           <a:prstGeom prst="rect">
             <a:avLst/>
@@ -2305,7 +2305,7 @@
                 <a:latin typeface="Segoe UI"/>
                 <a:cs typeface="Segoe UI"/>
               </a:rPr>
-              <a:t xml:space="preserve">y = 3x − 5</a:t>
+              <a:t xml:space="preserve">y = 3x + 2</a:t>
             </a:r>
             <a:br>
               <a:rPr lang="en-US" sz="1800" dirty="0">
@@ -2324,7 +2324,7 @@
                 <a:latin typeface="Segoe UI"/>
                 <a:cs typeface="Segoe UI"/>
               </a:rPr>
-              <a:t xml:space="preserve">Parallel lines have the same slope. Only y = 3x − 5 has slope 3.</a:t>
+              <a:t xml:space="preserve">Parallel: same slope 3. Put in the point: 5 = 3(1) + b, so b = 2 and y = 3x + 2.</a:t>
             </a:r>
             <a:endParaRPr lang="en-US" sz="1800" dirty="0"/>
           </a:p>
@@ -2338,7 +2338,7 @@
         </p:nvCxnSpPr>
         <p:spPr>
           <a:xfrm>
-            <a:off x="685800" y="3481578"/>
+            <a:off x="685800" y="3755898"/>
             <a:ext cx="10820095" cy="0"/>
           </a:xfrm>
           <a:prstGeom prst="line">
@@ -3595,7 +3595,7 @@
                 <a:latin typeface="Segoe UI"/>
                 <a:cs typeface="Segoe UI"/>
               </a:rPr>
-              <a:t xml:space="preserve">f(x) = 2x − 1. What is the y-intercept of g(x) = f(x) + 6?</a:t>
+              <a:t xml:space="preserve">The graph of f(x) = x is transformed to make g(x) = x − 2. Which describes the transformation?</a:t>
             </a:r>
             <a:endParaRPr lang="en-US" sz="1800" dirty="0"/>
           </a:p>
@@ -3639,7 +3639,7 @@
                 <a:latin typeface="Segoe UI"/>
                 <a:cs typeface="Segoe UI"/>
               </a:rPr>
-              <a:t xml:space="preserve">(0, 5)</a:t>
+              <a:t xml:space="preserve">A translation down 2 units</a:t>
             </a:r>
             <a:br>
               <a:rPr lang="en-US" sz="1800" dirty="0">
@@ -3658,7 +3658,7 @@
                 <a:latin typeface="Segoe UI"/>
                 <a:cs typeface="Segoe UI"/>
               </a:rPr>
-              <a:t xml:space="preserve">g(x) = 2x − 1 + 6 = 2x + 5, so the y-intercept moves from (0, −1) up 6 to (0, 5).</a:t>
+              <a:t xml:space="preserve">The − 2 is outside: it subtracts 2 from every output, so the graph moves down 2.</a:t>
             </a:r>
             <a:endParaRPr lang="en-US" sz="1800" dirty="0"/>
           </a:p>
@@ -4885,7 +4885,7 @@
                 <a:latin typeface="Segoe UI"/>
                 <a:cs typeface="Segoe UI"/>
               </a:rPr>
-              <a:t xml:space="preserve"> · SE p. 280</a:t>
+              <a:t xml:space="preserve"> · SE p. 278</a:t>
             </a:r>
             <a:endParaRPr lang="en-US" sz="1800" dirty="0"/>
           </a:p>
@@ -4929,7 +4929,7 @@
                 <a:latin typeface="Segoe UI"/>
                 <a:cs typeface="Segoe UI"/>
               </a:rPr>
-              <a:t xml:space="preserve">f(x) = x and g(x) = 2f(x) − 5. What is the y-intercept of g(x)?</a:t>
+              <a:t xml:space="preserve">Which function is a reflection of f(x) = x across the x-axis and a vertical dilation by a factor of 2?</a:t>
             </a:r>
             <a:endParaRPr lang="en-US" sz="1800" dirty="0"/>
           </a:p>
@@ -4973,7 +4973,7 @@
                 <a:latin typeface="Segoe UI"/>
                 <a:cs typeface="Segoe UI"/>
               </a:rPr>
-              <a:t xml:space="preserve">(0, −5)</a:t>
+              <a:t xml:space="preserve">g(x) = −2x</a:t>
             </a:r>
             <a:br>
               <a:rPr lang="en-US" sz="1800" dirty="0">
@@ -4992,7 +4992,7 @@
                 <a:latin typeface="Segoe UI"/>
                 <a:cs typeface="Segoe UI"/>
               </a:rPr>
-              <a:t xml:space="preserve">g(x) = 2x − 5. The dilation keeps (0, 0) fixed, then the graph moves down 5.</a:t>
+              <a:t xml:space="preserve">a = −2: the negative sign reflects across the x-axis, and |−2| = 2 stretches by 2.</a:t>
             </a:r>
             <a:endParaRPr lang="en-US" sz="1800" dirty="0"/>
           </a:p>
